--- a/Convolutional Neural Networks and Vision Transformers for Natural and Urban Scene Classification.pptx
+++ b/Convolutional Neural Networks and Vision Transformers for Natural and Urban Scene Classification.pptx
@@ -5030,7 +5030,7 @@
         </p:nvSpPr>
         <p:spPr>
           <a:xfrm>
-            <a:off x="6176489" y="4525317"/>
+            <a:off x="6239154" y="4445198"/>
             <a:ext cx="1039067" cy="646331"/>
           </a:xfrm>
           <a:prstGeom prst="rect">
@@ -5046,13 +5046,11 @@
           <a:p>
             <a:pPr algn="ctr"/>
             <a:r>
+              <a:rPr lang="en-US" b="1" dirty="0"/>
+              <a:t>17,034</a:t>
+            </a:r>
+            <a:r>
               <a:rPr lang="en-US" b="1" dirty="0">
-                <a:latin typeface="Montserrat" pitchFamily="2" charset="0"/>
-              </a:rPr>
-              <a:t>24,335</a:t>
-            </a:r>
-            <a:r>
-              <a:rPr lang="en-US" dirty="0">
                 <a:latin typeface="Montserrat" pitchFamily="2" charset="0"/>
               </a:rPr>
               <a:t> </a:t>
